--- a/presentations/itmo_rules.pptx
+++ b/presentations/itmo_rules.pptx
@@ -5942,7 +5942,7 @@
           <a:p>
             <a:fld id="{5BCAD085-E8A6-8845-BD4E-CB4CCA059FC4}" type="datetimeFigureOut">
               <a:rPr lang="en-US" smtClean="0"/>
-              <a:t>8/27/2026</a:t>
+              <a:t>8/31/2026</a:t>
             </a:fld>
             <a:endParaRPr lang="en-US"/>
           </a:p>
@@ -6112,7 +6112,7 @@
           <a:p>
             <a:fld id="{5BCAD085-E8A6-8845-BD4E-CB4CCA059FC4}" type="datetimeFigureOut">
               <a:rPr lang="en-US" smtClean="0"/>
-              <a:t>8/27/2026</a:t>
+              <a:t>8/31/2026</a:t>
             </a:fld>
             <a:endParaRPr lang="en-US"/>
           </a:p>
@@ -6292,7 +6292,7 @@
           <a:p>
             <a:fld id="{5BCAD085-E8A6-8845-BD4E-CB4CCA059FC4}" type="datetimeFigureOut">
               <a:rPr lang="en-US" smtClean="0"/>
-              <a:t>8/27/2026</a:t>
+              <a:t>8/31/2026</a:t>
             </a:fld>
             <a:endParaRPr lang="en-US"/>
           </a:p>
@@ -6462,7 +6462,7 @@
           <a:p>
             <a:fld id="{5BCAD085-E8A6-8845-BD4E-CB4CCA059FC4}" type="datetimeFigureOut">
               <a:rPr lang="en-US" smtClean="0"/>
-              <a:t>8/27/2026</a:t>
+              <a:t>8/31/2026</a:t>
             </a:fld>
             <a:endParaRPr lang="en-US"/>
           </a:p>
@@ -6708,7 +6708,7 @@
           <a:p>
             <a:fld id="{5BCAD085-E8A6-8845-BD4E-CB4CCA059FC4}" type="datetimeFigureOut">
               <a:rPr lang="en-US" smtClean="0"/>
-              <a:t>8/27/2026</a:t>
+              <a:t>8/31/2026</a:t>
             </a:fld>
             <a:endParaRPr lang="en-US"/>
           </a:p>
@@ -6996,7 +6996,7 @@
           <a:p>
             <a:fld id="{5BCAD085-E8A6-8845-BD4E-CB4CCA059FC4}" type="datetimeFigureOut">
               <a:rPr lang="en-US" smtClean="0"/>
-              <a:t>8/27/2026</a:t>
+              <a:t>8/31/2026</a:t>
             </a:fld>
             <a:endParaRPr lang="en-US"/>
           </a:p>
@@ -7418,7 +7418,7 @@
           <a:p>
             <a:fld id="{5BCAD085-E8A6-8845-BD4E-CB4CCA059FC4}" type="datetimeFigureOut">
               <a:rPr lang="en-US" smtClean="0"/>
-              <a:t>8/27/2026</a:t>
+              <a:t>8/31/2026</a:t>
             </a:fld>
             <a:endParaRPr lang="en-US"/>
           </a:p>
@@ -7536,7 +7536,7 @@
           <a:p>
             <a:fld id="{5BCAD085-E8A6-8845-BD4E-CB4CCA059FC4}" type="datetimeFigureOut">
               <a:rPr lang="en-US" smtClean="0"/>
-              <a:t>8/27/2026</a:t>
+              <a:t>8/31/2026</a:t>
             </a:fld>
             <a:endParaRPr lang="en-US"/>
           </a:p>
@@ -7631,7 +7631,7 @@
           <a:p>
             <a:fld id="{5BCAD085-E8A6-8845-BD4E-CB4CCA059FC4}" type="datetimeFigureOut">
               <a:rPr lang="en-US" smtClean="0"/>
-              <a:t>8/27/2026</a:t>
+              <a:t>8/31/2026</a:t>
             </a:fld>
             <a:endParaRPr lang="en-US"/>
           </a:p>
@@ -7908,7 +7908,7 @@
           <a:p>
             <a:fld id="{5BCAD085-E8A6-8845-BD4E-CB4CCA059FC4}" type="datetimeFigureOut">
               <a:rPr lang="en-US" smtClean="0"/>
-              <a:t>8/27/2026</a:t>
+              <a:t>8/31/2026</a:t>
             </a:fld>
             <a:endParaRPr lang="en-US"/>
           </a:p>
@@ -8161,7 +8161,7 @@
           <a:p>
             <a:fld id="{5BCAD085-E8A6-8845-BD4E-CB4CCA059FC4}" type="datetimeFigureOut">
               <a:rPr lang="en-US" smtClean="0"/>
-              <a:t>8/27/2026</a:t>
+              <a:t>8/31/2026</a:t>
             </a:fld>
             <a:endParaRPr lang="en-US"/>
           </a:p>
@@ -8374,7 +8374,7 @@
           <a:p>
             <a:fld id="{5BCAD085-E8A6-8845-BD4E-CB4CCA059FC4}" type="datetimeFigureOut">
               <a:rPr lang="en-US" smtClean="0"/>
-              <a:t>8/27/2026</a:t>
+              <a:t>8/31/2026</a:t>
             </a:fld>
             <a:endParaRPr lang="en-US"/>
           </a:p>
@@ -8960,7 +8960,7 @@
         <p:spPr>
           <a:xfrm>
             <a:off x="1005840" y="4103622"/>
-            <a:ext cx="10058400" cy="822960"/>
+            <a:ext cx="10058400" cy="687111"/>
           </a:xfrm>
           <a:prstGeom prst="rect">
             <a:avLst/>
@@ -8987,8 +8987,27 @@
                 <a:ea typeface="Calibri"/>
                 <a:cs typeface="Calibri"/>
               </a:rPr>
-              <a:t>How a coalition of willing countries could make carbon trading</a:t>
-            </a:r>
+              <a:t>How a coalition of willing countries could make carbon </a:t>
+            </a:r>
+            <a:r>
+              <a:rPr sz="2000" b="0" i="1" dirty="0" smtClean="0">
+                <a:solidFill>
+                  <a:srgbClr val="A9BCCF"/>
+                </a:solidFill>
+                <a:latin typeface="Calibri"/>
+                <a:ea typeface="Calibri"/>
+                <a:cs typeface="Calibri"/>
+              </a:rPr>
+              <a:t>trading</a:t>
+            </a:r>
+            <a:endParaRPr lang="fr-FR" sz="2000" b="0" i="1" dirty="0" smtClean="0">
+              <a:solidFill>
+                <a:srgbClr val="A9BCCF"/>
+              </a:solidFill>
+              <a:latin typeface="Calibri"/>
+              <a:ea typeface="Calibri"/>
+              <a:cs typeface="Calibri"/>
+            </a:endParaRPr>
           </a:p>
           <a:p>
             <a:pPr algn="l">
@@ -8997,6 +9016,17 @@
               </a:lnSpc>
             </a:pPr>
             <a:r>
+              <a:rPr sz="2000" b="0" i="1" dirty="0" smtClean="0">
+                <a:solidFill>
+                  <a:srgbClr val="A9BCCF"/>
+                </a:solidFill>
+                <a:latin typeface="Calibri"/>
+                <a:ea typeface="Calibri"/>
+                <a:cs typeface="Calibri"/>
+              </a:rPr>
+              <a:t>serve </a:t>
+            </a:r>
+            <a:r>
               <a:rPr sz="2000" b="0" i="1" dirty="0">
                 <a:solidFill>
                   <a:srgbClr val="A9BCCF"/>
@@ -9005,7 +9035,7 @@
                 <a:ea typeface="Calibri"/>
                 <a:cs typeface="Calibri"/>
               </a:rPr>
-              <a:t>serve the Paris Agreement instead of undermining it</a:t>
+              <a:t>the Paris Agreement instead of undermining it</a:t>
             </a:r>
           </a:p>
         </p:txBody>
@@ -19857,41 +19887,6 @@
           </a:p>
         </p:txBody>
       </p:sp>
-      <p:cxnSp>
-        <p:nvCxnSpPr>
-          <p:cNvPr id="4" name="Connector 3"/>
-          <p:cNvCxnSpPr/>
-          <p:nvPr/>
-        </p:nvCxnSpPr>
-        <p:spPr>
-          <a:xfrm>
-            <a:off x="566928" y="6345936"/>
-            <a:ext cx="11057839" cy="0"/>
-          </a:xfrm>
-          <a:prstGeom prst="line">
-            <a:avLst/>
-          </a:prstGeom>
-          <a:ln w="12700">
-            <a:solidFill>
-              <a:srgbClr val="E2E9EF"/>
-            </a:solidFill>
-          </a:ln>
-        </p:spPr>
-        <p:style>
-          <a:lnRef idx="2">
-            <a:schemeClr val="accent1"/>
-          </a:lnRef>
-          <a:fillRef idx="0">
-            <a:schemeClr val="accent1"/>
-          </a:fillRef>
-          <a:effectRef idx="1">
-            <a:schemeClr val="accent1"/>
-          </a:effectRef>
-          <a:fontRef idx="minor">
-            <a:schemeClr val="tx1"/>
-          </a:fontRef>
-        </p:style>
-      </p:cxnSp>
       <p:sp>
         <p:nvSpPr>
           <p:cNvPr id="5" name="TextBox 4"/>
@@ -20855,221 +20850,6 @@
                 <a:cs typeface="Calibri"/>
               </a:rPr>
               <a:t>Price floors, climate clubs, fossil fuel non-proliferation</a:t>
-            </a:r>
-          </a:p>
-        </p:txBody>
-      </p:sp>
-      <p:sp>
-        <p:nvSpPr>
-          <p:cNvPr id="32" name="Rounded Rectangle 31"/>
-          <p:cNvSpPr/>
-          <p:nvPr/>
-        </p:nvSpPr>
-        <p:spPr>
-          <a:xfrm>
-            <a:off x="566928" y="5376672"/>
-            <a:ext cx="11057839" cy="786384"/>
-          </a:xfrm>
-          <a:prstGeom prst="roundRect">
-            <a:avLst>
-              <a:gd name="adj" fmla="val 6000"/>
-            </a:avLst>
-          </a:prstGeom>
-          <a:solidFill>
-            <a:srgbClr val="F1F4F7"/>
-          </a:solidFill>
-          <a:ln>
-            <a:noFill/>
-          </a:ln>
-          <a:effectLst/>
-        </p:spPr>
-        <p:style>
-          <a:lnRef idx="1">
-            <a:schemeClr val="accent1"/>
-          </a:lnRef>
-          <a:fillRef idx="3">
-            <a:schemeClr val="accent1"/>
-          </a:fillRef>
-          <a:effectRef idx="2">
-            <a:schemeClr val="accent1"/>
-          </a:effectRef>
-          <a:fontRef idx="minor">
-            <a:schemeClr val="lt1"/>
-          </a:fontRef>
-        </p:style>
-        <p:txBody>
-          <a:bodyPr wrap="square" rtlCol="0" anchor="ctr"/>
-          <a:lstStyle/>
-          <a:p>
-            <a:pPr algn="ctr"/>
-            <a:endParaRPr/>
-          </a:p>
-        </p:txBody>
-      </p:sp>
-      <p:sp>
-        <p:nvSpPr>
-          <p:cNvPr id="33" name="Rectangle 32"/>
-          <p:cNvSpPr/>
-          <p:nvPr/>
-        </p:nvSpPr>
-        <p:spPr>
-          <a:xfrm>
-            <a:off x="566928" y="5376672"/>
-            <a:ext cx="68580" cy="786384"/>
-          </a:xfrm>
-          <a:prstGeom prst="rect">
-            <a:avLst/>
-          </a:prstGeom>
-          <a:solidFill>
-            <a:srgbClr val="0E7C7B"/>
-          </a:solidFill>
-          <a:ln>
-            <a:noFill/>
-          </a:ln>
-          <a:effectLst/>
-        </p:spPr>
-        <p:style>
-          <a:lnRef idx="1">
-            <a:schemeClr val="accent1"/>
-          </a:lnRef>
-          <a:fillRef idx="3">
-            <a:schemeClr val="accent1"/>
-          </a:fillRef>
-          <a:effectRef idx="2">
-            <a:schemeClr val="accent1"/>
-          </a:effectRef>
-          <a:fontRef idx="minor">
-            <a:schemeClr val="lt1"/>
-          </a:fontRef>
-        </p:style>
-        <p:txBody>
-          <a:bodyPr wrap="square" rtlCol="0" anchor="ctr"/>
-          <a:lstStyle/>
-          <a:p>
-            <a:pPr algn="ctr"/>
-            <a:endParaRPr/>
-          </a:p>
-        </p:txBody>
-      </p:sp>
-      <p:sp>
-        <p:nvSpPr>
-          <p:cNvPr id="34" name="TextBox 33"/>
-          <p:cNvSpPr txBox="1"/>
-          <p:nvPr/>
-        </p:nvSpPr>
-        <p:spPr>
-          <a:xfrm>
-            <a:off x="859536" y="5522976"/>
-            <a:ext cx="548640" cy="457200"/>
-          </a:xfrm>
-          <a:prstGeom prst="rect">
-            <a:avLst/>
-          </a:prstGeom>
-          <a:noFill/>
-        </p:spPr>
-        <p:txBody>
-          <a:bodyPr wrap="square" lIns="18288" tIns="0" rIns="18288" bIns="0" anchor="t">
-            <a:spAutoFit/>
-          </a:bodyPr>
-          <a:lstStyle/>
-          <a:p>
-            <a:pPr algn="l">
-              <a:lnSpc>
-                <a:spcPct val="100000"/>
-              </a:lnSpc>
-            </a:pPr>
-            <a:r>
-              <a:rPr sz="2600" b="1" i="0">
-                <a:solidFill>
-                  <a:srgbClr val="0E7C7B"/>
-                </a:solidFill>
-                <a:latin typeface="Calibri"/>
-                <a:ea typeface="Calibri"/>
-                <a:cs typeface="Calibri"/>
-              </a:rPr>
-              <a:t>5</a:t>
-            </a:r>
-          </a:p>
-        </p:txBody>
-      </p:sp>
-      <p:sp>
-        <p:nvSpPr>
-          <p:cNvPr id="35" name="TextBox 34"/>
-          <p:cNvSpPr txBox="1"/>
-          <p:nvPr/>
-        </p:nvSpPr>
-        <p:spPr>
-          <a:xfrm>
-            <a:off x="1481328" y="5486400"/>
-            <a:ext cx="7680960" cy="365760"/>
-          </a:xfrm>
-          <a:prstGeom prst="rect">
-            <a:avLst/>
-          </a:prstGeom>
-          <a:noFill/>
-        </p:spPr>
-        <p:txBody>
-          <a:bodyPr wrap="square" lIns="18288" tIns="0" rIns="18288" bIns="0" anchor="t">
-            <a:spAutoFit/>
-          </a:bodyPr>
-          <a:lstStyle/>
-          <a:p>
-            <a:pPr algn="l">
-              <a:lnSpc>
-                <a:spcPct val="100000"/>
-              </a:lnSpc>
-            </a:pPr>
-            <a:r>
-              <a:rPr sz="2000" b="1" i="0">
-                <a:solidFill>
-                  <a:srgbClr val="11243A"/>
-                </a:solidFill>
-                <a:latin typeface="Calibri"/>
-                <a:ea typeface="Calibri"/>
-                <a:cs typeface="Calibri"/>
-              </a:rPr>
-              <a:t>Takeaways</a:t>
-            </a:r>
-          </a:p>
-        </p:txBody>
-      </p:sp>
-      <p:sp>
-        <p:nvSpPr>
-          <p:cNvPr id="36" name="TextBox 35"/>
-          <p:cNvSpPr txBox="1"/>
-          <p:nvPr/>
-        </p:nvSpPr>
-        <p:spPr>
-          <a:xfrm>
-            <a:off x="1481328" y="5824728"/>
-            <a:ext cx="8595360" cy="320040"/>
-          </a:xfrm>
-          <a:prstGeom prst="rect">
-            <a:avLst/>
-          </a:prstGeom>
-          <a:noFill/>
-        </p:spPr>
-        <p:txBody>
-          <a:bodyPr wrap="square" lIns="18288" tIns="0" rIns="18288" bIns="0" anchor="t">
-            <a:spAutoFit/>
-          </a:bodyPr>
-          <a:lstStyle/>
-          <a:p>
-            <a:pPr algn="l">
-              <a:lnSpc>
-                <a:spcPct val="100000"/>
-              </a:lnSpc>
-            </a:pPr>
-            <a:r>
-              <a:rPr sz="1400" b="0" i="1">
-                <a:solidFill>
-                  <a:srgbClr val="6B7A8F"/>
-                </a:solidFill>
-                <a:latin typeface="Calibri"/>
-                <a:ea typeface="Calibri"/>
-                <a:cs typeface="Calibri"/>
-              </a:rPr>
-              <a:t>What a willing coalition should do next</a:t>
             </a:r>
           </a:p>
         </p:txBody>
@@ -22768,16 +22548,57 @@
               <a:t> </a:t>
             </a:r>
             <a:r>
-              <a:rPr sz="1800" b="0" i="0" dirty="0">
-                <a:solidFill>
-                  <a:srgbClr val="11243A"/>
-                </a:solidFill>
-                <a:latin typeface="Calibri"/>
-                <a:ea typeface="Calibri"/>
-                <a:cs typeface="Calibri"/>
-              </a:rPr>
-              <a:t>a test:</a:t>
-            </a:r>
+              <a:rPr lang="fr-FR" sz="1800" b="0" i="0" dirty="0" err="1" smtClean="0">
+                <a:solidFill>
+                  <a:srgbClr val="11243A"/>
+                </a:solidFill>
+                <a:latin typeface="Calibri"/>
+                <a:ea typeface="Calibri"/>
+                <a:cs typeface="Calibri"/>
+              </a:rPr>
+              <a:t>two</a:t>
+            </a:r>
+            <a:r>
+              <a:rPr sz="1800" b="0" i="0" dirty="0" smtClean="0">
+                <a:solidFill>
+                  <a:srgbClr val="11243A"/>
+                </a:solidFill>
+                <a:latin typeface="Calibri"/>
+                <a:ea typeface="Calibri"/>
+                <a:cs typeface="Calibri"/>
+              </a:rPr>
+              <a:t> test</a:t>
+            </a:r>
+            <a:r>
+              <a:rPr lang="fr-FR" sz="1800" b="0" i="0" dirty="0" smtClean="0">
+                <a:solidFill>
+                  <a:srgbClr val="11243A"/>
+                </a:solidFill>
+                <a:latin typeface="Calibri"/>
+                <a:ea typeface="Calibri"/>
+                <a:cs typeface="Calibri"/>
+              </a:rPr>
+              <a:t>s</a:t>
+            </a:r>
+            <a:r>
+              <a:rPr sz="1800" b="0" i="0" dirty="0" smtClean="0">
+                <a:solidFill>
+                  <a:srgbClr val="11243A"/>
+                </a:solidFill>
+                <a:latin typeface="Calibri"/>
+                <a:ea typeface="Calibri"/>
+                <a:cs typeface="Calibri"/>
+              </a:rPr>
+              <a:t>:</a:t>
+            </a:r>
+            <a:endParaRPr sz="1800" b="0" i="0" dirty="0">
+              <a:solidFill>
+                <a:srgbClr val="11243A"/>
+              </a:solidFill>
+              <a:latin typeface="Calibri"/>
+              <a:ea typeface="Calibri"/>
+              <a:cs typeface="Calibri"/>
+            </a:endParaRPr>
           </a:p>
         </p:txBody>
       </p:sp>
@@ -28267,10 +28088,21 @@
                 <a:ea typeface="Calibri"/>
                 <a:cs typeface="Calibri"/>
               </a:rPr>
-              <a:t>Start from a focal point: each country gets the </a:t>
-            </a:r>
-            <a:r>
-              <a:rPr lang="fr-FR" sz="1450" b="0" i="0" dirty="0" smtClean="0">
+              <a:t>Start from a focal point: </a:t>
+            </a:r>
+            <a:r>
+              <a:rPr sz="1450" b="1" i="0" dirty="0">
+                <a:solidFill>
+                  <a:srgbClr val="11243A"/>
+                </a:solidFill>
+                <a:latin typeface="Calibri"/>
+                <a:ea typeface="Calibri"/>
+                <a:cs typeface="Calibri"/>
+              </a:rPr>
+              <a:t>each country gets the </a:t>
+            </a:r>
+            <a:r>
+              <a:rPr lang="fr-FR" sz="1450" b="1" i="0" dirty="0" smtClean="0">
                 <a:solidFill>
                   <a:srgbClr val="11243A"/>
                 </a:solidFill>
@@ -28281,7 +28113,7 @@
               <a:t>minimum</a:t>
             </a:r>
             <a:r>
-              <a:rPr sz="1450" b="0" i="0" dirty="0" smtClean="0">
+              <a:rPr sz="1450" b="1" i="0" dirty="0" smtClean="0">
                 <a:solidFill>
                   <a:srgbClr val="11243A"/>
                 </a:solidFill>
@@ -28292,6 +28124,17 @@
               <a:t> </a:t>
             </a:r>
             <a:r>
+              <a:rPr sz="1450" b="1" i="0" dirty="0">
+                <a:solidFill>
+                  <a:srgbClr val="11243A"/>
+                </a:solidFill>
+                <a:latin typeface="Calibri"/>
+                <a:ea typeface="Calibri"/>
+                <a:cs typeface="Calibri"/>
+              </a:rPr>
+              <a:t>of its projected emissions, its existing pledge, and its equal-per-capita share of the coalition's path</a:t>
+            </a:r>
+            <a:r>
               <a:rPr sz="1450" b="0" i="0" dirty="0">
                 <a:solidFill>
                   <a:srgbClr val="11243A"/>
@@ -28300,7 +28143,7 @@
                 <a:ea typeface="Calibri"/>
                 <a:cs typeface="Calibri"/>
               </a:rPr>
-              <a:t>of its projected emissions, its existing pledge, and its equal-per-capita share of the coalition's path. Then hand extra room to the poorest members and to those hit hardest.</a:t>
+              <a:t>. Then hand extra room to the poorest members and to those hit hardest.</a:t>
             </a:r>
           </a:p>
         </p:txBody>
@@ -41556,7 +41399,7 @@
         <p:spPr>
           <a:xfrm>
             <a:off x="566928" y="384048"/>
-            <a:ext cx="11057839" cy="566928"/>
+            <a:ext cx="11057839" cy="492443"/>
           </a:xfrm>
           <a:prstGeom prst="rect">
             <a:avLst/>
@@ -41575,16 +41418,68 @@
               </a:lnSpc>
             </a:pPr>
             <a:r>
-              <a:rPr sz="3200" b="1" i="0">
-                <a:solidFill>
-                  <a:srgbClr val="11243A"/>
-                </a:solidFill>
-                <a:latin typeface="Calibri"/>
-                <a:ea typeface="Calibri"/>
-                <a:cs typeface="Calibri"/>
-              </a:rPr>
-              <a:t>Three decades in one line</a:t>
-            </a:r>
+              <a:rPr sz="3200" b="1" i="0" dirty="0">
+                <a:solidFill>
+                  <a:srgbClr val="11243A"/>
+                </a:solidFill>
+                <a:latin typeface="Calibri"/>
+                <a:ea typeface="Calibri"/>
+                <a:cs typeface="Calibri"/>
+              </a:rPr>
+              <a:t>Three decades </a:t>
+            </a:r>
+            <a:r>
+              <a:rPr lang="fr-FR" sz="3200" b="1" i="0" dirty="0" smtClean="0">
+                <a:solidFill>
+                  <a:srgbClr val="11243A"/>
+                </a:solidFill>
+                <a:latin typeface="Calibri"/>
+                <a:ea typeface="Calibri"/>
+                <a:cs typeface="Calibri"/>
+              </a:rPr>
+              <a:t>of </a:t>
+            </a:r>
+            <a:r>
+              <a:rPr lang="fr-FR" sz="3200" b="1" i="0" dirty="0" err="1" smtClean="0">
+                <a:solidFill>
+                  <a:srgbClr val="11243A"/>
+                </a:solidFill>
+                <a:latin typeface="Calibri"/>
+                <a:ea typeface="Calibri"/>
+                <a:cs typeface="Calibri"/>
+              </a:rPr>
+              <a:t>climate</a:t>
+            </a:r>
+            <a:r>
+              <a:rPr lang="fr-FR" sz="3200" b="1" i="0" dirty="0" smtClean="0">
+                <a:solidFill>
+                  <a:srgbClr val="11243A"/>
+                </a:solidFill>
+                <a:latin typeface="Calibri"/>
+                <a:ea typeface="Calibri"/>
+                <a:cs typeface="Calibri"/>
+              </a:rPr>
+              <a:t> </a:t>
+            </a:r>
+            <a:r>
+              <a:rPr lang="fr-FR" sz="3200" b="1" i="0" dirty="0" err="1" smtClean="0">
+                <a:solidFill>
+                  <a:srgbClr val="11243A"/>
+                </a:solidFill>
+                <a:latin typeface="Calibri"/>
+                <a:ea typeface="Calibri"/>
+                <a:cs typeface="Calibri"/>
+              </a:rPr>
+              <a:t>negotiations</a:t>
+            </a:r>
+            <a:endParaRPr sz="3200" b="1" i="0" dirty="0">
+              <a:solidFill>
+                <a:srgbClr val="11243A"/>
+              </a:solidFill>
+              <a:latin typeface="Calibri"/>
+              <a:ea typeface="Calibri"/>
+              <a:cs typeface="Calibri"/>
+            </a:endParaRPr>
           </a:p>
         </p:txBody>
       </p:sp>
@@ -41633,47 +41528,6 @@
           </a:p>
         </p:txBody>
       </p:sp>
-      <p:sp>
-        <p:nvSpPr>
-          <p:cNvPr id="7" name="TextBox 6"/>
-          <p:cNvSpPr txBox="1"/>
-          <p:nvPr/>
-        </p:nvSpPr>
-        <p:spPr>
-          <a:xfrm>
-            <a:off x="566928" y="1170432"/>
-            <a:ext cx="11057839" cy="384048"/>
-          </a:xfrm>
-          <a:prstGeom prst="rect">
-            <a:avLst/>
-          </a:prstGeom>
-          <a:noFill/>
-        </p:spPr>
-        <p:txBody>
-          <a:bodyPr wrap="square" lIns="18288" tIns="0" rIns="18288" bIns="0" anchor="t">
-            <a:spAutoFit/>
-          </a:bodyPr>
-          <a:lstStyle/>
-          <a:p>
-            <a:pPr algn="l">
-              <a:lnSpc>
-                <a:spcPct val="100000"/>
-              </a:lnSpc>
-            </a:pPr>
-            <a:r>
-              <a:rPr sz="1700" b="0" i="1">
-                <a:solidFill>
-                  <a:srgbClr val="6B7A8F"/>
-                </a:solidFill>
-                <a:latin typeface="Calibri"/>
-                <a:ea typeface="Calibri"/>
-                <a:cs typeface="Calibri"/>
-              </a:rPr>
-              <a:t>The architecture of the regime</a:t>
-            </a:r>
-          </a:p>
-        </p:txBody>
-      </p:sp>
       <p:cxnSp>
         <p:nvCxnSpPr>
           <p:cNvPr id="8" name="Connector 7"/>
@@ -42867,15 +42721,228 @@
               </a:lnSpc>
             </a:pPr>
             <a:r>
-              <a:rPr sz="1700" b="0" i="0">
-                <a:solidFill>
-                  <a:srgbClr val="11243A"/>
-                </a:solidFill>
-                <a:latin typeface="Calibri"/>
-                <a:ea typeface="Calibri"/>
-                <a:cs typeface="Calibri"/>
-              </a:rPr>
-              <a:t>Kyoto told countries what to do and almost nobody signed. Copenhagen tried again and collapsed. Paris let countries decide for themselves — and everybody signed.</a:t>
+              <a:rPr sz="1700" b="0" i="0" dirty="0">
+                <a:solidFill>
+                  <a:srgbClr val="11243A"/>
+                </a:solidFill>
+                <a:latin typeface="Calibri"/>
+                <a:ea typeface="Calibri"/>
+                <a:cs typeface="Calibri"/>
+              </a:rPr>
+              <a:t>Kyoto </a:t>
+            </a:r>
+            <a:r>
+              <a:rPr lang="fr-FR" sz="1700" b="0" i="0" dirty="0" err="1" smtClean="0">
+                <a:solidFill>
+                  <a:srgbClr val="11243A"/>
+                </a:solidFill>
+                <a:latin typeface="Calibri"/>
+                <a:ea typeface="Calibri"/>
+                <a:cs typeface="Calibri"/>
+              </a:rPr>
+              <a:t>exempted</a:t>
+            </a:r>
+            <a:r>
+              <a:rPr lang="fr-FR" sz="1700" b="0" i="0" dirty="0" smtClean="0">
+                <a:solidFill>
+                  <a:srgbClr val="11243A"/>
+                </a:solidFill>
+                <a:latin typeface="Calibri"/>
+                <a:ea typeface="Calibri"/>
+                <a:cs typeface="Calibri"/>
+              </a:rPr>
+              <a:t> </a:t>
+            </a:r>
+            <a:r>
+              <a:rPr lang="fr-FR" sz="1700" b="0" i="0" dirty="0" err="1" smtClean="0">
+                <a:solidFill>
+                  <a:srgbClr val="11243A"/>
+                </a:solidFill>
+                <a:latin typeface="Calibri"/>
+                <a:ea typeface="Calibri"/>
+                <a:cs typeface="Calibri"/>
+              </a:rPr>
+              <a:t>developing</a:t>
+            </a:r>
+            <a:r>
+              <a:rPr lang="fr-FR" sz="1700" b="0" i="0" dirty="0" smtClean="0">
+                <a:solidFill>
+                  <a:srgbClr val="11243A"/>
+                </a:solidFill>
+                <a:latin typeface="Calibri"/>
+                <a:ea typeface="Calibri"/>
+                <a:cs typeface="Calibri"/>
+              </a:rPr>
+              <a:t> countries</a:t>
+            </a:r>
+            <a:r>
+              <a:rPr sz="1700" b="0" i="0" dirty="0" smtClean="0">
+                <a:solidFill>
+                  <a:srgbClr val="11243A"/>
+                </a:solidFill>
+                <a:latin typeface="Calibri"/>
+                <a:ea typeface="Calibri"/>
+                <a:cs typeface="Calibri"/>
+              </a:rPr>
+              <a:t> </a:t>
+            </a:r>
+            <a:r>
+              <a:rPr sz="1700" b="0" i="0" dirty="0">
+                <a:solidFill>
+                  <a:srgbClr val="11243A"/>
+                </a:solidFill>
+                <a:latin typeface="Calibri"/>
+                <a:ea typeface="Calibri"/>
+                <a:cs typeface="Calibri"/>
+              </a:rPr>
+              <a:t>and </a:t>
+            </a:r>
+            <a:r>
+              <a:rPr lang="fr-FR" sz="1700" b="0" i="0" dirty="0" smtClean="0">
+                <a:solidFill>
+                  <a:srgbClr val="11243A"/>
+                </a:solidFill>
+                <a:latin typeface="Calibri"/>
+                <a:ea typeface="Calibri"/>
+                <a:cs typeface="Calibri"/>
+              </a:rPr>
+              <a:t>few </a:t>
+            </a:r>
+            <a:r>
+              <a:rPr sz="1700" b="0" i="0" dirty="0" smtClean="0">
+                <a:solidFill>
+                  <a:srgbClr val="11243A"/>
+                </a:solidFill>
+                <a:latin typeface="Calibri"/>
+                <a:ea typeface="Calibri"/>
+                <a:cs typeface="Calibri"/>
+              </a:rPr>
+              <a:t>signed</a:t>
+            </a:r>
+            <a:r>
+              <a:rPr sz="1700" b="0" i="0" dirty="0">
+                <a:solidFill>
+                  <a:srgbClr val="11243A"/>
+                </a:solidFill>
+                <a:latin typeface="Calibri"/>
+                <a:ea typeface="Calibri"/>
+                <a:cs typeface="Calibri"/>
+              </a:rPr>
+              <a:t>. Copenhagen </a:t>
+            </a:r>
+            <a:r>
+              <a:rPr lang="fr-FR" sz="1700" b="0" i="0" dirty="0" err="1" smtClean="0">
+                <a:solidFill>
+                  <a:srgbClr val="11243A"/>
+                </a:solidFill>
+                <a:latin typeface="Calibri"/>
+                <a:ea typeface="Calibri"/>
+                <a:cs typeface="Calibri"/>
+              </a:rPr>
+              <a:t>attempted</a:t>
+            </a:r>
+            <a:r>
+              <a:rPr sz="1700" b="0" i="0" dirty="0" smtClean="0">
+                <a:solidFill>
+                  <a:srgbClr val="11243A"/>
+                </a:solidFill>
+                <a:latin typeface="Calibri"/>
+                <a:ea typeface="Calibri"/>
+                <a:cs typeface="Calibri"/>
+              </a:rPr>
+              <a:t> </a:t>
+            </a:r>
+            <a:r>
+              <a:rPr lang="fr-FR" sz="1700" b="0" i="0" dirty="0" smtClean="0">
+                <a:solidFill>
+                  <a:srgbClr val="11243A"/>
+                </a:solidFill>
+                <a:latin typeface="Calibri"/>
+                <a:ea typeface="Calibri"/>
+                <a:cs typeface="Calibri"/>
+              </a:rPr>
+              <a:t>a </a:t>
+            </a:r>
+            <a:r>
+              <a:rPr lang="fr-FR" sz="1700" b="0" i="0" dirty="0" err="1" smtClean="0">
+                <a:solidFill>
+                  <a:srgbClr val="11243A"/>
+                </a:solidFill>
+                <a:latin typeface="Calibri"/>
+                <a:ea typeface="Calibri"/>
+                <a:cs typeface="Calibri"/>
+              </a:rPr>
+              <a:t>comprehensive</a:t>
+            </a:r>
+            <a:r>
+              <a:rPr lang="fr-FR" sz="1700" b="0" i="0" dirty="0" smtClean="0">
+                <a:solidFill>
+                  <a:srgbClr val="11243A"/>
+                </a:solidFill>
+                <a:latin typeface="Calibri"/>
+                <a:ea typeface="Calibri"/>
+                <a:cs typeface="Calibri"/>
+              </a:rPr>
+              <a:t> agreement</a:t>
+            </a:r>
+            <a:r>
+              <a:rPr sz="1700" b="0" i="0" dirty="0" smtClean="0">
+                <a:solidFill>
+                  <a:srgbClr val="11243A"/>
+                </a:solidFill>
+                <a:latin typeface="Calibri"/>
+                <a:ea typeface="Calibri"/>
+                <a:cs typeface="Calibri"/>
+              </a:rPr>
+              <a:t> </a:t>
+            </a:r>
+            <a:r>
+              <a:rPr sz="1700" b="0" i="0" dirty="0">
+                <a:solidFill>
+                  <a:srgbClr val="11243A"/>
+                </a:solidFill>
+                <a:latin typeface="Calibri"/>
+                <a:ea typeface="Calibri"/>
+                <a:cs typeface="Calibri"/>
+              </a:rPr>
+              <a:t>and collapsed. </a:t>
+            </a:r>
+            <a:endParaRPr lang="fr-FR" sz="1700" b="0" i="0" dirty="0" smtClean="0">
+              <a:solidFill>
+                <a:srgbClr val="11243A"/>
+              </a:solidFill>
+              <a:latin typeface="Calibri"/>
+              <a:ea typeface="Calibri"/>
+              <a:cs typeface="Calibri"/>
+            </a:endParaRPr>
+          </a:p>
+          <a:p>
+            <a:pPr algn="ctr">
+              <a:lnSpc>
+                <a:spcPct val="120000"/>
+              </a:lnSpc>
+            </a:pPr>
+            <a:r>
+              <a:rPr sz="1700" b="0" i="0" dirty="0" smtClean="0">
+                <a:solidFill>
+                  <a:srgbClr val="11243A"/>
+                </a:solidFill>
+                <a:latin typeface="Calibri"/>
+                <a:ea typeface="Calibri"/>
+                <a:cs typeface="Calibri"/>
+              </a:rPr>
+              <a:t>Paris </a:t>
+            </a:r>
+            <a:r>
+              <a:rPr sz="1700" b="0" i="0" dirty="0">
+                <a:solidFill>
+                  <a:srgbClr val="11243A"/>
+                </a:solidFill>
+                <a:latin typeface="Calibri"/>
+                <a:ea typeface="Calibri"/>
+                <a:cs typeface="Calibri"/>
+              </a:rPr>
+              <a:t>let countries decide for themselves — and everybody signed.</a:t>
             </a:r>
           </a:p>
         </p:txBody>
@@ -44150,7 +44217,7 @@
               </a:lnSpc>
             </a:pPr>
             <a:r>
-              <a:rPr sz="2600" b="1" i="0">
+              <a:rPr sz="2600" b="1" i="0" dirty="0">
                 <a:solidFill>
                   <a:srgbClr val="0E7C7B"/>
                 </a:solidFill>
@@ -44158,8 +44225,27 @@
                 <a:ea typeface="Calibri"/>
                 <a:cs typeface="Calibri"/>
               </a:rPr>
-              <a:t>41 Gt</a:t>
-            </a:r>
+              <a:t>41 </a:t>
+            </a:r>
+            <a:r>
+              <a:rPr sz="2600" b="1" i="0" dirty="0" smtClean="0">
+                <a:solidFill>
+                  <a:srgbClr val="0E7C7B"/>
+                </a:solidFill>
+                <a:latin typeface="Calibri"/>
+                <a:ea typeface="Calibri"/>
+                <a:cs typeface="Calibri"/>
+              </a:rPr>
+              <a:t>Gt</a:t>
+            </a:r>
+            <a:endParaRPr sz="2600" b="1" i="0" dirty="0">
+              <a:solidFill>
+                <a:srgbClr val="0E7C7B"/>
+              </a:solidFill>
+              <a:latin typeface="Calibri"/>
+              <a:ea typeface="Calibri"/>
+              <a:cs typeface="Calibri"/>
+            </a:endParaRPr>
           </a:p>
         </p:txBody>
       </p:sp>
@@ -44313,7 +44399,7 @@
               </a:lnSpc>
             </a:pPr>
             <a:r>
-              <a:rPr sz="2600" b="1" i="0">
+              <a:rPr sz="2600" b="1" i="0" dirty="0" smtClean="0">
                 <a:solidFill>
                   <a:srgbClr val="D9532C"/>
                 </a:solidFill>
@@ -44323,6 +44409,14 @@
               </a:rPr>
               <a:t>51 Gt</a:t>
             </a:r>
+            <a:endParaRPr sz="2600" b="1" i="0" dirty="0">
+              <a:solidFill>
+                <a:srgbClr val="D9532C"/>
+              </a:solidFill>
+              <a:latin typeface="Calibri"/>
+              <a:ea typeface="Calibri"/>
+              <a:cs typeface="Calibri"/>
+            </a:endParaRPr>
           </a:p>
         </p:txBody>
       </p:sp>
